--- a/ImagenesJMCFlow.pptx
+++ b/ImagenesJMCFlow.pptx
@@ -4352,7 +4352,7 @@
         </p:blipFill>
         <p:spPr>
           <a:xfrm>
-            <a:off x="3144984" y="1872343"/>
+            <a:off x="1591955" y="2002971"/>
             <a:ext cx="2951016" cy="2061027"/>
           </a:xfrm>
           <a:prstGeom prst="rect">
@@ -4360,6 +4360,366 @@
           </a:prstGeom>
         </p:spPr>
       </p:pic>
+      <p:sp>
+        <p:nvSpPr>
+          <p:cNvPr id="4" name="CuadroTexto 3">
+            <a:extLst>
+              <a:ext uri="{FF2B5EF4-FFF2-40B4-BE49-F238E27FC236}">
+                <a16:creationId xmlns:a16="http://schemas.microsoft.com/office/drawing/2014/main" id="{F1536721-2F65-D400-128A-E65403CBBF7F}"/>
+              </a:ext>
+            </a:extLst>
+          </p:cNvPr>
+          <p:cNvSpPr txBox="1"/>
+          <p:nvPr/>
+        </p:nvSpPr>
+        <p:spPr>
+          <a:xfrm>
+            <a:off x="5297714" y="1095452"/>
+            <a:ext cx="6096000" cy="4355038"/>
+          </a:xfrm>
+          <a:prstGeom prst="rect">
+            <a:avLst/>
+          </a:prstGeom>
+          <a:noFill/>
+        </p:spPr>
+        <p:txBody>
+          <a:bodyPr wrap="square">
+            <a:spAutoFit/>
+          </a:bodyPr>
+          <a:lstStyle/>
+          <a:p>
+            <a:pPr marL="0" marR="0" indent="0" algn="l">
+              <a:spcAft>
+                <a:spcPts val="1200"/>
+              </a:spcAft>
+              <a:buNone/>
+            </a:pPr>
+            <a:r>
+              <a:rPr lang="es-MX" sz="975" b="0" i="0" dirty="0">
+                <a:solidFill>
+                  <a:srgbClr val="202020"/>
+                </a:solidFill>
+                <a:effectLst/>
+                <a:latin typeface="-apple-system"/>
+              </a:rPr>
+              <a:t>Para que la galería se vea bien y responda bien en móvil/tablet/desktop, te recomiendo estas medidas:</a:t>
+            </a:r>
+          </a:p>
+          <a:p>
+            <a:pPr marL="0" marR="0" indent="0" algn="l">
+              <a:spcBef>
+                <a:spcPts val="300"/>
+              </a:spcBef>
+              <a:spcAft>
+                <a:spcPts val="300"/>
+              </a:spcAft>
+              <a:buFont typeface="Arial" panose="020B0604020202020204" pitchFamily="34" charset="0"/>
+              <a:buChar char="•"/>
+            </a:pPr>
+            <a:r>
+              <a:rPr lang="es-MX" sz="975" b="0" i="0" dirty="0">
+                <a:solidFill>
+                  <a:srgbClr val="202020"/>
+                </a:solidFill>
+                <a:effectLst/>
+                <a:latin typeface="-apple-system"/>
+              </a:rPr>
+              <a:t>Brands (logos):</a:t>
+            </a:r>
+          </a:p>
+          <a:p>
+            <a:pPr marL="742950" marR="0" lvl="1" indent="-285750" algn="l">
+              <a:spcBef>
+                <a:spcPts val="300"/>
+              </a:spcBef>
+              <a:spcAft>
+                <a:spcPts val="300"/>
+              </a:spcAft>
+              <a:buFont typeface="Arial" panose="020B0604020202020204" pitchFamily="34" charset="0"/>
+              <a:buChar char="•"/>
+            </a:pPr>
+            <a:r>
+              <a:rPr lang="es-MX" sz="975" b="0" i="0" dirty="0">
+                <a:solidFill>
+                  <a:srgbClr val="202020"/>
+                </a:solidFill>
+                <a:effectLst/>
+                <a:latin typeface="-apple-system"/>
+              </a:rPr>
+              <a:t>Ancho: 200 a 400 px</a:t>
+            </a:r>
+          </a:p>
+          <a:p>
+            <a:pPr marL="742950" marR="0" lvl="1" indent="-285750" algn="l">
+              <a:spcBef>
+                <a:spcPts val="300"/>
+              </a:spcBef>
+              <a:spcAft>
+                <a:spcPts val="300"/>
+              </a:spcAft>
+              <a:buFont typeface="Arial" panose="020B0604020202020204" pitchFamily="34" charset="0"/>
+              <a:buChar char="•"/>
+            </a:pPr>
+            <a:r>
+              <a:rPr lang="es-MX" sz="975" b="0" i="0" dirty="0">
+                <a:solidFill>
+                  <a:srgbClr val="202020"/>
+                </a:solidFill>
+                <a:effectLst/>
+                <a:latin typeface="-apple-system"/>
+              </a:rPr>
+              <a:t>Alto: 100 a 220 px</a:t>
+            </a:r>
+          </a:p>
+          <a:p>
+            <a:pPr marL="742950" marR="0" lvl="1" indent="-285750" algn="l">
+              <a:spcBef>
+                <a:spcPts val="300"/>
+              </a:spcBef>
+              <a:spcAft>
+                <a:spcPts val="300"/>
+              </a:spcAft>
+              <a:buFont typeface="Arial" panose="020B0604020202020204" pitchFamily="34" charset="0"/>
+              <a:buChar char="•"/>
+            </a:pPr>
+            <a:r>
+              <a:rPr lang="es-MX" sz="975" b="0" i="0" dirty="0">
+                <a:solidFill>
+                  <a:srgbClr val="202020"/>
+                </a:solidFill>
+                <a:effectLst/>
+                <a:latin typeface="-apple-system"/>
+              </a:rPr>
+              <a:t>Formato: SVG o PNG con fondo transparente</a:t>
+            </a:r>
+          </a:p>
+          <a:p>
+            <a:pPr marL="742950" marR="0" lvl="1" indent="-285750" algn="l">
+              <a:spcBef>
+                <a:spcPts val="300"/>
+              </a:spcBef>
+              <a:spcAft>
+                <a:spcPts val="300"/>
+              </a:spcAft>
+              <a:buFont typeface="Arial" panose="020B0604020202020204" pitchFamily="34" charset="0"/>
+              <a:buChar char="•"/>
+            </a:pPr>
+            <a:r>
+              <a:rPr lang="es-MX" sz="975" b="0" i="0" dirty="0">
+                <a:solidFill>
+                  <a:srgbClr val="202020"/>
+                </a:solidFill>
+                <a:effectLst/>
+                <a:latin typeface="-apple-system"/>
+              </a:rPr>
+              <a:t>Peso ideal: 50 a 250 KB</a:t>
+            </a:r>
+          </a:p>
+          <a:p>
+            <a:pPr marL="0" marR="0" indent="0" algn="l">
+              <a:spcBef>
+                <a:spcPts val="300"/>
+              </a:spcBef>
+              <a:spcAft>
+                <a:spcPts val="300"/>
+              </a:spcAft>
+              <a:buFont typeface="Arial" panose="020B0604020202020204" pitchFamily="34" charset="0"/>
+              <a:buChar char="•"/>
+            </a:pPr>
+            <a:r>
+              <a:rPr lang="es-MX" sz="975" b="0" i="0" dirty="0">
+                <a:solidFill>
+                  <a:srgbClr val="202020"/>
+                </a:solidFill>
+                <a:effectLst/>
+                <a:latin typeface="-apple-system"/>
+              </a:rPr>
+              <a:t>Products (imágenes de equipos):</a:t>
+            </a:r>
+          </a:p>
+          <a:p>
+            <a:pPr marL="742950" marR="0" lvl="1" indent="-285750" algn="l">
+              <a:spcBef>
+                <a:spcPts val="300"/>
+              </a:spcBef>
+              <a:spcAft>
+                <a:spcPts val="300"/>
+              </a:spcAft>
+              <a:buFont typeface="Arial" panose="020B0604020202020204" pitchFamily="34" charset="0"/>
+              <a:buChar char="•"/>
+            </a:pPr>
+            <a:r>
+              <a:rPr lang="es-MX" sz="975" b="0" i="0" dirty="0">
+                <a:solidFill>
+                  <a:srgbClr val="202020"/>
+                </a:solidFill>
+                <a:effectLst/>
+                <a:latin typeface="-apple-system"/>
+              </a:rPr>
+              <a:t>Ancho: 1200 a 1800 px</a:t>
+            </a:r>
+          </a:p>
+          <a:p>
+            <a:pPr marL="742950" marR="0" lvl="1" indent="-285750" algn="l">
+              <a:spcBef>
+                <a:spcPts val="300"/>
+              </a:spcBef>
+              <a:spcAft>
+                <a:spcPts val="300"/>
+              </a:spcAft>
+              <a:buFont typeface="Arial" panose="020B0604020202020204" pitchFamily="34" charset="0"/>
+              <a:buChar char="•"/>
+            </a:pPr>
+            <a:r>
+              <a:rPr lang="es-MX" sz="975" b="0" i="0" dirty="0">
+                <a:solidFill>
+                  <a:srgbClr val="202020"/>
+                </a:solidFill>
+                <a:effectLst/>
+                <a:latin typeface="-apple-system"/>
+              </a:rPr>
+              <a:t>Alto: 800 a 1200 px</a:t>
+            </a:r>
+          </a:p>
+          <a:p>
+            <a:pPr marL="742950" marR="0" lvl="1" indent="-285750" algn="l">
+              <a:spcBef>
+                <a:spcPts val="300"/>
+              </a:spcBef>
+              <a:spcAft>
+                <a:spcPts val="300"/>
+              </a:spcAft>
+              <a:buFont typeface="Arial" panose="020B0604020202020204" pitchFamily="34" charset="0"/>
+              <a:buChar char="•"/>
+            </a:pPr>
+            <a:r>
+              <a:rPr lang="es-MX" sz="975" b="0" i="0" dirty="0">
+                <a:solidFill>
+                  <a:srgbClr val="202020"/>
+                </a:solidFill>
+                <a:effectLst/>
+                <a:latin typeface="-apple-system"/>
+              </a:rPr>
+              <a:t>Formato: JPG/WebP</a:t>
+            </a:r>
+          </a:p>
+          <a:p>
+            <a:pPr marL="742950" marR="0" lvl="1" indent="-285750" algn="l">
+              <a:spcBef>
+                <a:spcPts val="300"/>
+              </a:spcBef>
+              <a:spcAft>
+                <a:spcPts val="300"/>
+              </a:spcAft>
+              <a:buFont typeface="Arial" panose="020B0604020202020204" pitchFamily="34" charset="0"/>
+              <a:buChar char="•"/>
+            </a:pPr>
+            <a:r>
+              <a:rPr lang="es-MX" sz="975" b="0" i="0" dirty="0">
+                <a:solidFill>
+                  <a:srgbClr val="202020"/>
+                </a:solidFill>
+                <a:effectLst/>
+                <a:latin typeface="-apple-system"/>
+              </a:rPr>
+              <a:t>Peso ideal: 200 a 800 KB</a:t>
+            </a:r>
+          </a:p>
+          <a:p>
+            <a:pPr marL="0" marR="0" indent="0" algn="l">
+              <a:spcAft>
+                <a:spcPts val="1200"/>
+              </a:spcAft>
+              <a:buNone/>
+            </a:pPr>
+            <a:r>
+              <a:rPr lang="es-MX" sz="975" b="0" i="0" dirty="0">
+                <a:solidFill>
+                  <a:srgbClr val="202020"/>
+                </a:solidFill>
+                <a:effectLst/>
+                <a:latin typeface="-apple-system"/>
+              </a:rPr>
+              <a:t>Recomendación práctica:</a:t>
+            </a:r>
+          </a:p>
+          <a:p>
+            <a:pPr marL="0" marR="0" indent="0" algn="l">
+              <a:spcBef>
+                <a:spcPts val="300"/>
+              </a:spcBef>
+              <a:spcAft>
+                <a:spcPts val="300"/>
+              </a:spcAft>
+              <a:buFont typeface="Arial" panose="020B0604020202020204" pitchFamily="34" charset="0"/>
+              <a:buChar char="•"/>
+            </a:pPr>
+            <a:r>
+              <a:rPr lang="es-MX" sz="975" b="0" i="0" dirty="0">
+                <a:solidFill>
+                  <a:srgbClr val="202020"/>
+                </a:solidFill>
+                <a:effectLst/>
+                <a:latin typeface="-apple-system"/>
+              </a:rPr>
+              <a:t>Usa logos en SVG si puedes; se ven nítidos en cualquier tamaño y pesan muy poco.</a:t>
+            </a:r>
+          </a:p>
+          <a:p>
+            <a:pPr marL="0" marR="0" indent="0" algn="l">
+              <a:spcBef>
+                <a:spcPts val="300"/>
+              </a:spcBef>
+              <a:spcAft>
+                <a:spcPts val="300"/>
+              </a:spcAft>
+              <a:buFont typeface="Arial" panose="020B0604020202020204" pitchFamily="34" charset="0"/>
+              <a:buChar char="•"/>
+            </a:pPr>
+            <a:r>
+              <a:rPr lang="es-MX" sz="975" b="0" i="0" dirty="0">
+                <a:solidFill>
+                  <a:srgbClr val="202020"/>
+                </a:solidFill>
+                <a:effectLst/>
+                <a:latin typeface="-apple-system"/>
+              </a:rPr>
+              <a:t>Para fotos de equipos, usa WebP o JPG de alto rango dinámico, con relación de aspecto cercana a 4:3 o 3:2.</a:t>
+            </a:r>
+          </a:p>
+          <a:p>
+            <a:pPr marL="0" marR="0" indent="0" algn="l">
+              <a:spcBef>
+                <a:spcPts val="300"/>
+              </a:spcBef>
+              <a:spcAft>
+                <a:spcPts val="300"/>
+              </a:spcAft>
+              <a:buFont typeface="Arial" panose="020B0604020202020204" pitchFamily="34" charset="0"/>
+              <a:buChar char="•"/>
+            </a:pPr>
+            <a:r>
+              <a:rPr lang="es-MX" sz="975" b="0" i="0" dirty="0">
+                <a:solidFill>
+                  <a:srgbClr val="202020"/>
+                </a:solidFill>
+                <a:effectLst/>
+                <a:latin typeface="-apple-system"/>
+              </a:rPr>
+              <a:t>Evita imágenes muy pesadas o muy pequeñas; si son demasiado pequeñas se verán pixeladas al expandirse, y si son muy grandes ralentizan la carga.</a:t>
+            </a:r>
+          </a:p>
+          <a:p>
+            <a:pPr>
+              <a:buNone/>
+            </a:pPr>
+            <a:br>
+              <a:rPr lang="es-MX" dirty="0"/>
+            </a:br>
+            <a:endParaRPr lang="es-MX" dirty="0"/>
+          </a:p>
+        </p:txBody>
+      </p:sp>
     </p:spTree>
     <p:extLst>
       <p:ext uri="{BB962C8B-B14F-4D97-AF65-F5344CB8AC3E}">
